--- a/output/SS_Generic_Furniture.pptx
+++ b/output/SS_Generic_Furniture.pptx
@@ -9887,7 +9887,7 @@
                           <a:cs typeface="Inter"/>
                           <a:sym typeface="Inter"/>
                         </a:rPr>
-                        <a:t>sheesham, 6-seater, teak, dining table under 60k</a:t>
+                        <a:t>sheesham, 6-seater, teak, dining table, within budget</a:t>
                       </a:r>
                       <a:endParaRPr sz="1000" u="none" cap="none" strike="noStrike">
                         <a:latin typeface="Inter"/>
@@ -13768,7 +13768,7 @@
                 <a:cs typeface="Inter"/>
                 <a:sym typeface="Inter"/>
               </a:rPr>
-              <a:t>What an AI Shopping Assistant changes :  “I need a compact sofa under 30000 for my 10x12 living room, fabric in earth tones, should double as a guest bed”</a:t>
+              <a:t>What an AI Shopping Assistant changes :  “I need a compact sofa for my 10x12 living room, fabric in earth tones, should double as a guest bed”</a:t>
             </a:r>
             <a:endParaRPr b="0" i="0" sz="1100" u="none" cap="none" strike="noStrike">
               <a:solidFill>
@@ -14657,7 +14657,7 @@
                 <a:cs typeface="Inter"/>
                 <a:sym typeface="Inter"/>
               </a:rPr>
-              <a:t>Unlike traditional search bars that only cater to keyword matching for direct queries like “queen size bed” or “6-seater dining table”, AI chat assistants need to answer intent based queries like “I want furniture for my new home” or “I want a sofa that fits my 10x12 living room”. They have to map buyer intent to keywords using a knowledge graph and then search the catalog for relevant products using keywords, refer to the diagram in the next slide for an example</a:t>
+              <a:t>Unlike traditional search bars that only cater to keyword matching for direct queries like “queen size bed” or “6-seater dining table”, AI chat assistants need to answer intent based queries like “I want furniture for my new home” or “I want a sofa that fits my 10x12 living room”. They have to map buyer intent to keywords using a knowledge graph and then search the catalog for relevant products using keywords, refer to the diagram on slide 11 for an example</a:t>
             </a:r>
             <a:endParaRPr b="0" i="0" sz="1200" u="none" cap="none" strike="noStrike">
               <a:solidFill>

--- a/output/SS_Generic_Furniture.pptx
+++ b/output/SS_Generic_Furniture.pptx
@@ -13935,16 +13935,17 @@
       </p:sp>
       <p:pic>
         <p:nvPicPr>
-          <p:cNvPr id="59" name="Google Shape;59;p4" title="Screenshot 2026-04-14 at 9.08.05 PM.png"/>
-          <p:cNvPicPr preferRelativeResize="0"/>
+          <p:cNvPr id="59" name="Picture 58" descr="furniture_table.png"/>
+          <p:cNvPicPr>
+            <a:picLocks noChangeAspect="1"/>
+          </p:cNvPicPr>
           <p:nvPr/>
         </p:nvPicPr>
-        <p:blipFill rotWithShape="1">
-          <a:blip r:embed="rId3">
-            <a:alphaModFix/>
-          </a:blip>
-          <a:srcRect b="0" l="0" r="0" t="0"/>
-          <a:stretch/>
+        <p:blipFill>
+          <a:blip r:embed="rId4"/>
+          <a:stretch>
+            <a:fillRect/>
+          </a:stretch>
         </p:blipFill>
         <p:spPr>
           <a:xfrm>
@@ -13954,10 +13955,6 @@
           <a:prstGeom prst="rect">
             <a:avLst/>
           </a:prstGeom>
-          <a:noFill/>
-          <a:ln>
-            <a:noFill/>
-          </a:ln>
         </p:spPr>
       </p:pic>
     </p:spTree>

--- a/output/SS_Generic_Furniture.pptx
+++ b/output/SS_Generic_Furniture.pptx
@@ -6259,7 +6259,7 @@
                 <a:cs typeface="Inter"/>
                 <a:sym typeface="Inter"/>
               </a:rPr>
-              <a:t>An AI shopping assistant doesn't just search — it sells</a:t>
+              <a:t>Your AI sales associate doesn't just search — it sells</a:t>
             </a:r>
             <a:endParaRPr b="0" i="0" sz="2300" u="none" cap="none" strike="noStrike">
               <a:solidFill>
@@ -6450,7 +6450,7 @@
                 <a:cs typeface="Inter"/>
                 <a:sym typeface="Inter"/>
               </a:rPr>
-              <a:t>Clarifies intent instead of dumping a catalog — asks the right follow-up questions (occasion, budget, use-case, size/fit) before suggesting anything.</a:t>
+              <a:t>Like your best sales associate, it clarifies intent instead of dumping a catalog — asks the right follow-up questions (occasion, budget, use-case, size/fit) before suggesting anything.</a:t>
             </a:r>
             <a:endParaRPr b="0" i="0" sz="1100" u="none" cap="none" strike="noStrike">
               <a:solidFill>
@@ -13768,7 +13768,7 @@
                 <a:cs typeface="Inter"/>
                 <a:sym typeface="Inter"/>
               </a:rPr>
-              <a:t>What an AI Shopping Assistant changes :  “I need a compact sofa for my 10x12 living room, fabric in earth tones, should double as a guest bed”</a:t>
+              <a:t>What an AI Sales Associate changes :  “I need a compact sofa for my 10x12 living room, fabric in earth tones, should double as a guest bed”</a:t>
             </a:r>
             <a:endParaRPr b="0" i="0" sz="1100" u="none" cap="none" strike="noStrike">
               <a:solidFill>
@@ -13808,7 +13808,7 @@
                 <a:cs typeface="Inter"/>
                 <a:sym typeface="Inter"/>
               </a:rPr>
-              <a:t>An AI shopping assistant powered by a knowledge graph understands intent + constraints + context, it maps small living room to compact/2-seater, guest bed to sofa cum bed, adds the conditions for price and fabric and returns relevant products from the catalog - exactly what the shopper means and wants, not just what they typed.</a:t>
+              <a:t>An AI sales associate powered by a knowledge graph understands intent + constraints + context, it maps small living room to compact/2-seater, guest bed to sofa cum bed, adds the conditions for price and fabric and returns relevant products from the catalog - exactly what the shopper means and wants, not just what they typed.</a:t>
             </a:r>
             <a:endParaRPr b="0" i="0" sz="1100" u="none" cap="none" strike="noStrike">
               <a:solidFill>
@@ -15986,7 +15986,7 @@
                 <a:cs typeface="Inter"/>
                 <a:sym typeface="Inter"/>
               </a:rPr>
-              <a:t>AI Shopping Assistant on Website that can understand user intent</a:t>
+              <a:t>AI Sales Associate on your website that guides buyers to the right purchase</a:t>
             </a:r>
             <a:endParaRPr b="0" i="0" sz="1600" u="none" cap="none" strike="noStrike">
               <a:solidFill>
@@ -16052,7 +16052,7 @@
                 <a:cs typeface="Inter"/>
                 <a:sym typeface="Inter"/>
               </a:rPr>
-              <a:t>Chat-based shopping: voice, image, and text input</a:t>
+              <a:t>Acts as a digital sales associate — asks the right questions, understands what the buyer actually needs, and guides them to the right product</a:t>
             </a:r>
             <a:endParaRPr b="0" i="0" sz="1300" u="none" cap="none" strike="noStrike">
               <a:solidFill>
@@ -16092,7 +16092,7 @@
                 <a:cs typeface="Inter"/>
                 <a:sym typeface="Inter"/>
               </a:rPr>
-              <a:t>Lower cost per query - Graph handles 90%+ of queries, LLM tokens only for edge cases</a:t>
+              <a:t>Drives revenue, not just answers — every conversation is a guided selling opportunity that converts browsers into buyers</a:t>
             </a:r>
             <a:endParaRPr b="0" i="0" sz="1300" u="none" cap="none" strike="noStrike">
               <a:solidFill>
@@ -16132,7 +16132,7 @@
                 <a:cs typeface="Inter"/>
                 <a:sym typeface="Inter"/>
               </a:rPr>
-              <a:t>All intent based queries such as “furniture for a new 2BHK”, “office chair for back pain” handled just like in ChatGPT and Amazon Rufus, giving buyer a full conversational experience.</a:t>
+              <a:t>All intent based queries such as “furniture for a new 2BHK”, “office chair for back pain” handled just like in ChatGPT and Amazon Rufus, guiding buyers to a purchase just like your best in-store sales associate would.</a:t>
             </a:r>
             <a:endParaRPr b="0" i="0" sz="1300" u="none" cap="none" strike="noStrike">
               <a:solidFill>

--- a/output/SS_Generic_Furniture.pptx
+++ b/output/SS_Generic_Furniture.pptx
@@ -4875,7 +4875,7 @@
                 <a:cs typeface="Inter"/>
                 <a:sym typeface="Inter"/>
               </a:rPr>
-              <a:t>Conversational AI shopping assistants for for e-commerce websites</a:t>
+              <a:t>Conversational AI shopping assistants for e-commerce websites</a:t>
             </a:r>
             <a:endParaRPr b="0" i="0" sz="1600" u="none" cap="none" strike="noStrike">
               <a:solidFill>
@@ -6450,7 +6450,7 @@
                 <a:cs typeface="Inter"/>
                 <a:sym typeface="Inter"/>
               </a:rPr>
-              <a:t>Like your best sales associate, it clarifies intent instead of dumping a catalog — asks the right follow-up questions (occasion, budget, use-case, size/fit) before suggesting anything.</a:t>
+              <a:t>Like your best sales associate, it clarifies intent instead of dumping a catalog — asks the right follow-up questions (occasion, budget, use-case, room dimensions/style) before suggesting anything.</a:t>
             </a:r>
             <a:endParaRPr b="0" i="0" sz="1100" u="none" cap="none" strike="noStrike">
               <a:solidFill>
@@ -6655,7 +6655,7 @@
                 <a:cs typeface="Inter"/>
                 <a:sym typeface="Inter"/>
               </a:rPr>
-              <a:t>Stylist-grade cross-sell → AOV lift</a:t>
+              <a:t>Room-grade cross-sell → AOV lift</a:t>
             </a:r>
             <a:endParaRPr b="0" i="0" u="none" cap="none" strike="noStrike">
               <a:solidFill>
@@ -10467,7 +10467,7 @@
                 <a:cs typeface="Inter"/>
                 <a:sym typeface="Inter"/>
               </a:rPr>
-              <a:t>We can run a full 500-query audit on your site in under a week and show you exactly where you are losing crores in revenue..</a:t>
+              <a:t>We can run a full 500-query audit on your site in under a week and show you exactly where you are losing crores in revenue.</a:t>
             </a:r>
             <a:endParaRPr b="0" i="0" sz="1500" u="none" cap="none" strike="noStrike">
               <a:solidFill>
@@ -16773,7 +16773,7 @@
             </a:pPr>
             <a:r>
               <a:rPr b="1" lang="en-US" sz="2000"/>
-              <a:t>The future of e-commerce - shopping assistants, virtual try-on, multilingual queries and discovery through apps on LLM platforms.</a:t>
+              <a:t>The future of e-commerce - shopping assistants, AR room visualization, multilingual queries and discovery through apps on LLM platforms.</a:t>
             </a:r>
             <a:endParaRPr b="1" sz="2000"/>
           </a:p>
@@ -16815,15 +16815,7 @@
             </a:pPr>
             <a:r>
               <a:rPr lang="en-US"/>
-              <a:t xml:space="preserve">Buyers today are increasingly looking for virtual try-on to make more informed </a:t>
-            </a:r>
-            <a:r>
-              <a:rPr lang="en-US"/>
-              <a:t>decisions</a:t>
-            </a:r>
-            <a:r>
-              <a:rPr lang="en-US"/>
-              <a:t>.</a:t>
+              <a:t xml:space="preserve">Buyers today are increasingly looking for AR room visualization to make more informed decisions.</a:t>
             </a:r>
             <a:endParaRPr/>
           </a:p>
